--- a/docs/report.pptx
+++ b/docs/report.pptx
@@ -13,6 +13,7 @@
     <p:sldId id="261" r:id="rId7"/>
     <p:sldId id="262" r:id="rId8"/>
     <p:sldId id="263" r:id="rId9"/>
+    <p:sldId id="264" r:id="rId10"/>
   </p:sldIdLst>
   <p:sldSz cx="9144000" cy="5143500" type="screen16x9"/>
   <p:notesSz cx="6858000" cy="9144000"/>
@@ -3107,6 +3108,36 @@
             <p:ph type="title"/>
           </p:nvPr>
         </p:nvSpPr>
+        <p:spPr>
+          <a:xfrm>
+            <a:off x="457201" y="204787"/>
+            <a:ext cx="3008313" cy="871538"/>
+          </a:xfrm>
+        </p:spPr>
+        <p:txBody>
+          <a:bodyPr/>
+          <a:lstStyle/>
+          <a:p>
+            <a:pPr lvl="0" indent="0" marL="0">
+              <a:buNone/>
+            </a:pPr>
+            <a:r>
+              <a:rPr/>
+              <a:t>ChokePilot — Autonomous Choke Controller</a:t>
+            </a:r>
+          </a:p>
+        </p:txBody>
+      </p:sp>
+      <p:sp>
+        <p:nvSpPr>
+          <p:cNvPr id="4" name="Text Placeholder 3"/>
+          <p:cNvSpPr>
+            <a:spLocks noGrp="1"/>
+          </p:cNvSpPr>
+          <p:nvPr>
+            <p:ph idx="2" sz="half" type="body"/>
+          </p:nvPr>
+        </p:nvSpPr>
         <p:spPr/>
         <p:txBody>
           <a:bodyPr/>
@@ -3116,8 +3147,570 @@
               <a:buNone/>
             </a:pPr>
             <a:r>
-              <a:rPr/>
-              <a:t>ChokePilot — Autonomous Choke Controller</a:t>
+              <a:rPr i="1"/>
+              <a:t>Every table in this document marked </a:t>
+            </a:r>
+            <a:r>
+              <a:rPr i="1">
+                <a:latin typeface="Courier"/>
+              </a:rPr>
+              <a:t>&lt;!-- GENERATED --&gt;</a:t>
+            </a:r>
+            <a:r>
+              <a:rPr i="1"/>
+              <a:t> is rendered directly from </a:t>
+            </a:r>
+            <a:r>
+              <a:rPr i="1">
+                <a:latin typeface="Courier"/>
+              </a:rPr>
+              <a:t>outputs/results.json</a:t>
+            </a:r>
+            <a:r>
+              <a:rPr i="1"/>
+              <a:t> by </a:t>
+            </a:r>
+            <a:r>
+              <a:rPr i="1">
+                <a:latin typeface="Courier"/>
+              </a:rPr>
+              <a:t>generate_docs.py</a:t>
+            </a:r>
+            <a:r>
+              <a:rPr i="1"/>
+              <a:t>, from one fresh run of </a:t>
+            </a:r>
+            <a:r>
+              <a:rPr i="1">
+                <a:latin typeface="Courier"/>
+              </a:rPr>
+              <a:t>identify.py</a:t>
+            </a:r>
+            <a:r>
+              <a:rPr i="1"/>
+              <a:t> → </a:t>
+            </a:r>
+            <a:r>
+              <a:rPr i="1">
+                <a:latin typeface="Courier"/>
+              </a:rPr>
+              <a:t>verify_identification.py</a:t>
+            </a:r>
+            <a:r>
+              <a:rPr i="1"/>
+              <a:t> → </a:t>
+            </a:r>
+            <a:r>
+              <a:rPr i="1">
+                <a:latin typeface="Courier"/>
+              </a:rPr>
+              <a:t>scenarios.py</a:t>
+            </a:r>
+            <a:r>
+              <a:rPr i="1"/>
+              <a:t> → </a:t>
+            </a:r>
+            <a:r>
+              <a:rPr i="1">
+                <a:latin typeface="Courier"/>
+              </a:rPr>
+              <a:t>baselines.py</a:t>
+            </a:r>
+            <a:r>
+              <a:rPr i="1"/>
+              <a:t> → </a:t>
+            </a:r>
+            <a:r>
+              <a:rPr i="1">
+                <a:latin typeface="Courier"/>
+              </a:rPr>
+              <a:t>seed_sweep.py</a:t>
+            </a:r>
+            <a:r>
+              <a:rPr i="1"/>
+              <a:t> — not hand-typed, and not carried over from an earlier draft. Scenario D (§3.6) has no marker — </a:t>
+            </a:r>
+            <a:r>
+              <a:rPr i="1">
+                <a:latin typeface="Courier"/>
+              </a:rPr>
+              <a:t>scenario_d.py</a:t>
+            </a:r>
+            <a:r>
+              <a:rPr i="1"/>
+              <a:t> doesn’t write to </a:t>
+            </a:r>
+            <a:r>
+              <a:rPr i="1">
+                <a:latin typeface="Courier"/>
+              </a:rPr>
+              <a:t>results.json</a:t>
+            </a:r>
+            <a:r>
+              <a:rPr i="1"/>
+              <a:t> (a 200h run per approach is a different cost profile than the other scripts; not yet worth the wiring) — so its numbers are hand-maintained, but re-verified against a fresh </a:t>
+            </a:r>
+            <a:r>
+              <a:rPr i="1">
+                <a:latin typeface="Courier"/>
+              </a:rPr>
+              <a:t>python scenario_d.py</a:t>
+            </a:r>
+            <a:r>
+              <a:rPr i="1"/>
+              <a:t> run before being typed in, not carried over from memory. Prose sections narrate the reasoning and are written by hand, but are checked against the same fresh run before publishing.</a:t>
+            </a:r>
+          </a:p>
+          <a:p>
+            <a:pPr lvl="0" indent="0" marL="0">
+              <a:spcBef>
+                <a:spcPts val="3000"/>
+              </a:spcBef>
+              <a:buNone/>
+            </a:pPr>
+            <a:r>
+              <a:rPr b="1"/>
+              <a:t>0. Why this exists</a:t>
+            </a:r>
+          </a:p>
+          <a:p>
+            <a:pPr lvl="0" indent="0" marL="0">
+              <a:buNone/>
+            </a:pPr>
+            <a:r>
+              <a:rPr/>
+              <a:t>Five recurring pain points show up across upstream operations literature and practice, and they shaped every design decision below rather than sitting as background motivation:</a:t>
+            </a:r>
+          </a:p>
+          <a:p>
+            <a:pPr lvl="0" indent="-342900" marL="342900">
+              <a:buAutoNum type="arabicPeriod"/>
+            </a:pPr>
+            <a:r>
+              <a:rPr b="1"/>
+              <a:t>Operators “baby” the choke.</a:t>
+            </a:r>
+            <a:r>
+              <a:rPr/>
+              <a:t> Fear of sand production or formation damage leads to conservative, static settings that leave real production capacity on the table (Eng-Tips forum discussion among production engineers).</a:t>
+            </a:r>
+          </a:p>
+          <a:p>
+            <a:pPr lvl="0" indent="-342900" marL="342900">
+              <a:buAutoNum type="arabicPeriod"/>
+            </a:pPr>
+            <a:r>
+              <a:rPr b="1"/>
+              <a:t>One engineer, too many wells.</a:t>
+            </a:r>
+            <a:r>
+              <a:rPr/>
+              <a:t> A choke gets set once during a shift and then left alone, because nobody has the bandwidth to revisit it continuously (standard industry practice, as described in patent literature on well automation).</a:t>
+            </a:r>
+          </a:p>
+          <a:p>
+            <a:pPr lvl="0" indent="-342900" marL="342900">
+              <a:buAutoNum type="arabicPeriod"/>
+            </a:pPr>
+            <a:r>
+              <a:rPr b="1"/>
+              <a:t>Instability is caught reactively.</a:t>
+            </a:r>
+            <a:r>
+              <a:rPr/>
+              <a:t> Slugging and other flow instabilities are typically noticed only after a human sees the trend on a screen, not prevented (SPE technical paper on flow assurance).</a:t>
+            </a:r>
+          </a:p>
+          <a:p>
+            <a:pPr lvl="0" indent="-342900" marL="342900">
+              <a:buAutoNum type="arabicPeriod"/>
+            </a:pPr>
+            <a:r>
+              <a:rPr b="1"/>
+              <a:t>APC doesn’t scale upstream because models need a dedicated team.</a:t>
+            </a:r>
+            <a:r>
+              <a:rPr/>
+              <a:t> The on-record barrier from a Honeywell upstream solutions interview isn’t algorithmic sophistication — it’s that advanced process control adoption stalls because someone has to keep the model current. A search-based, no-heavy- optimizer controller with a fresh from-scratch identification step directly answers this: there is no solver license, no tuning of an optimizer’s internals, nothing exotic to maintain.</a:t>
+            </a:r>
+          </a:p>
+          <a:p>
+            <a:pPr lvl="0" indent="-342900" marL="342900">
+              <a:buAutoNum type="arabicPeriod"/>
+            </a:pPr>
+            <a:r>
+              <a:rPr b="1"/>
+              <a:t>Alarm fatigue and distrust of opaque automation.</a:t>
+            </a:r>
+            <a:r>
+              <a:rPr/>
+              <a:t> Operators override what they don’t understand (NTSB SCADA safety review). Answered directly in §2.4, not just in principle.</a:t>
+            </a:r>
+          </a:p>
+          <a:p>
+            <a:pPr lvl="0" indent="0" marL="0">
+              <a:buNone/>
+            </a:pPr>
+            <a:r>
+              <a:rPr/>
+              <a:t>ChokePilot is a small-scale, single-well version of the same closed-loop direction Honeywell’s APC customers are already moving toward on wells — a focused proof-of-concept of the wellhead-to-control-room optimization problem Honeywell’s Upstream Production Performance Suite (UPPS) addresses at scale. It does not claim equivalence; it echoes the same idea at a scale one person can build and verify in a project timeline.</a:t>
+            </a:r>
+          </a:p>
+          <a:p>
+            <a:pPr lvl="0" indent="0" marL="0">
+              <a:spcBef>
+                <a:spcPts val="3000"/>
+              </a:spcBef>
+              <a:buNone/>
+            </a:pPr>
+            <a:r>
+              <a:rPr b="1"/>
+              <a:t>1. Process Understanding &amp; Model</a:t>
+            </a:r>
+          </a:p>
+          <a:p>
+            <a:pPr lvl="0" indent="0" marL="0">
+              <a:spcBef>
+                <a:spcPts val="3000"/>
+              </a:spcBef>
+              <a:buNone/>
+            </a:pPr>
+            <a:r>
+              <a:rPr b="1"/>
+              <a:t>1.1 No official simulator, so a calibrated substitute stands in</a:t>
+            </a:r>
+          </a:p>
+          <a:p>
+            <a:pPr lvl="0" indent="0" marL="0">
+              <a:buNone/>
+            </a:pPr>
+            <a:r>
+              <a:rPr/>
+              <a:t>The platform provided no official simulator for this challenge — only </a:t>
+            </a:r>
+            <a:r>
+              <a:rPr>
+                <a:latin typeface="Courier"/>
+              </a:rPr>
+              <a:t>data/Autonomous_Choke_Control_Simulated_Dataset.csv</a:t>
+            </a:r>
+            <a:r>
+              <a:rPr/>
+              <a:t>, a single 120-hour run with the choke held at 30/40/55/45/65% in turn, and a presentation template. </a:t>
+            </a:r>
+            <a:r>
+              <a:rPr>
+                <a:latin typeface="Courier"/>
+              </a:rPr>
+              <a:t>data/simulator.py</a:t>
+            </a:r>
+            <a:r>
+              <a:rPr/>
+              <a:t> is a </a:t>
+            </a:r>
+            <a:r>
+              <a:rPr b="1"/>
+              <a:t>calibrated substitute</a:t>
+            </a:r>
+            <a:r>
+              <a:rPr/>
+              <a:t>, clearly commented as such, fit to that CSV:</a:t>
+            </a:r>
+          </a:p>
+          <a:p>
+            <a:pPr lvl="0"/>
+            <a:r>
+              <a:rPr b="1"/>
+              <a:t>Steady-state map</a:t>
+            </a:r>
+            <a:r>
+              <a:rPr/>
+              <a:t>, per channel independently: </a:t>
+            </a:r>
+            <a:r>
+              <a:rPr>
+                <a:latin typeface="Courier"/>
+              </a:rPr>
+              <a:t>y_ss(u) = A + B·u/(u+uh)</a:t>
+            </a:r>
+            <a:r>
+              <a:rPr/>
+              <a:t>. For oil rate </a:t>
+            </a:r>
+            <a:r>
+              <a:rPr>
+                <a:latin typeface="Courier"/>
+              </a:rPr>
+              <a:t>Q</a:t>
+            </a:r>
+            <a:r>
+              <a:rPr/>
+              <a:t>, </a:t>
+            </a:r>
+            <a:r>
+              <a:rPr>
+                <a:latin typeface="Courier"/>
+              </a:rPr>
+              <a:t>A</a:t>
+            </a:r>
+            <a:r>
+              <a:rPr/>
+              <a:t> is fixed at 0 (a fully shut choke must give zero flow).</a:t>
+            </a:r>
+          </a:p>
+          <a:p>
+            <a:pPr lvl="0"/>
+            <a:r>
+              <a:rPr b="1"/>
+              <a:t>Dynamics</a:t>
+            </a:r>
+            <a:r>
+              <a:rPr/>
+              <a:t>: first-order-plus-dead-time (FOPDT), discretized with the </a:t>
+            </a:r>
+            <a:r>
+              <a:rPr i="1"/>
+              <a:t>exact</a:t>
+            </a:r>
+            <a:r>
+              <a:rPr/>
+              <a:t> zero-order-hold form </a:t>
+            </a:r>
+            <a:r>
+              <a:rPr>
+                <a:latin typeface="Courier"/>
+              </a:rPr>
+              <a:t>alpha = 1 - exp(-Ts/tau)</a:t>
+            </a:r>
+            <a:r>
+              <a:rPr/>
+              <a:t> (not the Euler approximation </a:t>
+            </a:r>
+            <a:r>
+              <a:rPr>
+                <a:latin typeface="Courier"/>
+              </a:rPr>
+              <a:t>Ts/tau</a:t>
+            </a:r>
+            <a:r>
+              <a:rPr/>
+              <a:t>, which is only accurate when </a:t>
+            </a:r>
+            <a:r>
+              <a:rPr>
+                <a:latin typeface="Courier"/>
+              </a:rPr>
+              <a:t>Ts &lt;&lt; tau</a:t>
+            </a:r>
+            <a:r>
+              <a:rPr/>
+              <a:t> and can be unstable outside that regime).</a:t>
+            </a:r>
+          </a:p>
+          <a:p>
+            <a:pPr lvl="0"/>
+            <a:r>
+              <a:rPr b="1"/>
+              <a:t>Noise</a:t>
+            </a:r>
+            <a:r>
+              <a:rPr/>
+              <a:t>: independent Gaussian measurement noise per channel, matched to the residual std left after the fit, added to each reading without feeding back into the internal state (sensor noise, not process noise).</a:t>
+            </a:r>
+          </a:p>
+          <a:p>
+            <a:pPr lvl="0"/>
+            <a:r>
+              <a:rPr/>
+              <a:t>The steady-state fit uses </a:t>
+            </a:r>
+            <a:r>
+              <a:rPr b="1"/>
+              <a:t>only the last ~6 hours of each dwell period</a:t>
+            </a:r>
+            <a:r>
+              <a:rPr/>
+              <a:t> — samples close to actually being at steady state — not the whole trajectory including transients. Fitting on transient-contaminated samples was found to bias the curve and, downstream, the tau/theta search that compensated for it (see §1.2).</a:t>
+            </a:r>
+          </a:p>
+          <a:p>
+            <a:pPr lvl="0"/>
+            <a:r>
+              <a:rPr>
+                <a:latin typeface="Courier"/>
+              </a:rPr>
+              <a:t>uh</a:t>
+            </a:r>
+            <a:r>
+              <a:rPr/>
+              <a:t> and </a:t>
+            </a:r>
+            <a:r>
+              <a:rPr>
+                <a:latin typeface="Courier"/>
+              </a:rPr>
+              <a:t>(tau, theta)</a:t>
+            </a:r>
+            <a:r>
+              <a:rPr/>
+              <a:t> come from a brute-force grid search (linear part </a:t>
+            </a:r>
+            <a:r>
+              <a:rPr>
+                <a:latin typeface="Courier"/>
+              </a:rPr>
+              <a:t>A, B</a:t>
+            </a:r>
+            <a:r>
+              <a:rPr/>
+              <a:t> solved in closed form at each grid point) — no optimizer dependency.</a:t>
+            </a:r>
+          </a:p>
+          <a:p>
+            <a:pPr lvl="0" indent="0" marL="0">
+              <a:buNone/>
+            </a:pPr>
+            <a:r>
+              <a:rPr b="1"/>
+              <a:t>Important, honestly reported finding:</a:t>
+            </a:r>
+            <a:r>
+              <a:rPr/>
+              <a:t> with the uh grid widened to check for boundary-pinning, WHP, FLP, and BHP all pin at the widened boundary (50,000) — their steady-state response is </a:t>
+            </a:r>
+            <a:r>
+              <a:rPr b="1"/>
+              <a:t>statistically indistinguishable from linear</a:t>
+            </a:r>
+            <a:r>
+              <a:rPr/>
+              <a:t> over the reference data’s tested 30–65% choke range. Only </a:t>
+            </a:r>
+            <a:r>
+              <a:rPr>
+                <a:latin typeface="Courier"/>
+              </a:rPr>
+              <a:t>Q</a:t>
+            </a:r>
+            <a:r>
+              <a:rPr/>
+              <a:t>, anchored through zero, genuinely needs the saturating (Michaelis-Menten) shape. This is reported explicitly by the fitting code (a printed warning) rather than silently accepted.</a:t>
+            </a:r>
+          </a:p>
+          <a:p>
+            <a:pPr lvl="0" indent="0" marL="0">
+              <a:buNone/>
+            </a:pPr>
+            <a:r>
+              <a:rPr b="1"/>
+              <a:t>The reference CSV covers only 5 distinct choke levels</a:t>
+            </a:r>
+            <a:r>
+              <a:rPr/>
+              <a:t> (30, 40, 45, 55, 65%), each held for one dwell period, and the fit is a single deterministic least-squares point estimate — there is no confidence interval, bootstrap, or any other uncertainty quantification anywhere in this pipeline. Every downstream number (identified tau, safety limits, controller predictions) inherits that uncertainty without a formal error bar attached to it.</a:t>
+            </a:r>
+          </a:p>
+          <a:p>
+            <a:pPr lvl="0" indent="0" marL="0">
+              <a:spcBef>
+                <a:spcPts val="3000"/>
+              </a:spcBef>
+              <a:buNone/>
+            </a:pPr>
+            <a:r>
+              <a:rPr b="1"/>
+              <a:t>1.2 Fresh open-loop step test, and an honest accounting of what it tests</a:t>
+            </a:r>
+          </a:p>
+          <a:p>
+            <a:pPr lvl="0" indent="0" marL="0">
+              <a:buNone/>
+            </a:pPr>
+            <a:r>
+              <a:rPr/>
+              <a:t>Per the brief (“students are expected to generate their own data using the simulator”), </a:t>
+            </a:r>
+            <a:r>
+              <a:rPr>
+                <a:latin typeface="Courier"/>
+              </a:rPr>
+              <a:t>identify.py</a:t>
+            </a:r>
+            <a:r>
+              <a:rPr/>
+              <a:t> does not reuse the reference CSV for model identification. It drives its own monotonic staircase — 0/10/20/…/100% choke, 40 hours dwell per step (</a:t>
+            </a:r>
+            <a:r>
+              <a:rPr>
+                <a:latin typeface="Courier"/>
+              </a:rPr>
+              <a:t>DWELL_HOURS</a:t>
+            </a:r>
+            <a:r>
+              <a:rPr/>
+              <a:t>, see §1.2’s dwell-time history below) — against the calibrated simulator, and fits an FOPDT model to that fresh run.</a:t>
+            </a:r>
+          </a:p>
+        </p:txBody>
+      </p:sp>
+      <p:pic>
+        <p:nvPicPr>
+          <p:cNvPr descr="../outputs/step_test_response.png" id="0" name="Picture 1"/>
+          <p:cNvPicPr>
+            <a:picLocks noGrp="1" noChangeAspect="1"/>
+          </p:cNvPicPr>
+          <p:nvPr/>
+        </p:nvPicPr>
+        <p:blipFill>
+          <a:blip r:embed="rId2"/>
+          <a:stretch>
+            <a:fillRect/>
+          </a:stretch>
+        </p:blipFill>
+        <p:spPr bwMode="auto">
+          <a:xfrm>
+            <a:off x="4483100" y="203200"/>
+            <a:ext cx="3276600" cy="3873500"/>
+          </a:xfrm>
+          <a:prstGeom prst="rect">
+            <a:avLst/>
+          </a:prstGeom>
+          <a:noFill/>
+          <a:ln w="9525">
+            <a:noFill/>
+            <a:headEnd/>
+            <a:tailEnd/>
+          </a:ln>
+        </p:spPr>
+      </p:pic>
+      <p:sp>
+        <p:nvSpPr>
+          <p:cNvPr id="1" name="TextBox 3"/>
+          <p:cNvSpPr txBox="1"/>
+          <p:nvPr>
+            <p:ph idx="1"/>
+          </p:nvPr>
+        </p:nvSpPr>
+        <p:spPr>
+          <a:xfrm>
+            <a:off x="3568700" y="4076700"/>
+            <a:ext cx="5105400" cy="508000"/>
+          </a:xfrm>
+          <a:prstGeom prst="rect">
+            <a:avLst/>
+          </a:prstGeom>
+          <a:noFill/>
+        </p:spPr>
+        <p:txBody>
+          <a:bodyPr/>
+          <a:lstStyle/>
+          <a:p>
+            <a:pPr lvl="0" indent="0" marL="0" algn="ctr">
+              <a:buNone/>
+            </a:pPr>
+            <a:r>
+              <a:rPr/>
+              <a:t>Open-loop step test: choke staircase and the resulting oil rate, WHP, FLP, and BHP response</a:t>
             </a:r>
           </a:p>
         </p:txBody>
@@ -3132,12 +3725,7 @@
             <p:ph idx="1"/>
           </p:nvPr>
         </p:nvSpPr>
-        <p:spPr>
-          <a:xfrm>
-            <a:off x="457200" y="1193800"/>
-            <a:ext cx="8229600" cy="2273300"/>
-          </a:xfrm>
-        </p:spPr>
+        <p:spPr/>
         <p:txBody>
           <a:bodyPr/>
           <a:lstStyle/>
@@ -3146,256 +3734,42 @@
               <a:buNone/>
             </a:pPr>
             <a:r>
-              <a:rPr i="1"/>
-              <a:t>Every table in this document marked </a:t>
-            </a:r>
-            <a:r>
-              <a:rPr i="1">
-                <a:latin typeface="Courier"/>
-              </a:rPr>
-              <a:t>&lt;!-- GENERATED --&gt;</a:t>
-            </a:r>
-            <a:r>
-              <a:rPr i="1"/>
-              <a:t> is rendered directly from </a:t>
-            </a:r>
-            <a:r>
-              <a:rPr i="1">
-                <a:latin typeface="Courier"/>
-              </a:rPr>
-              <a:t>outputs/results.json</a:t>
-            </a:r>
-            <a:r>
-              <a:rPr i="1"/>
-              <a:t> by </a:t>
-            </a:r>
-            <a:r>
-              <a:rPr i="1">
-                <a:latin typeface="Courier"/>
-              </a:rPr>
-              <a:t>generate_docs.py</a:t>
-            </a:r>
-            <a:r>
-              <a:rPr i="1"/>
-              <a:t>, from one fresh run of </a:t>
-            </a:r>
-            <a:r>
-              <a:rPr i="1">
+              <a:rPr b="1"/>
+              <a:t>Reframing a claim from an earlier draft:</a:t>
+            </a:r>
+            <a:r>
+              <a:rPr/>
+              <a:t> </a:t>
+            </a:r>
+            <a:r>
+              <a:rPr>
                 <a:latin typeface="Courier"/>
               </a:rPr>
               <a:t>identify.py</a:t>
             </a:r>
             <a:r>
-              <a:rPr i="1"/>
-              <a:t> → </a:t>
-            </a:r>
-            <a:r>
-              <a:rPr i="1">
-                <a:latin typeface="Courier"/>
-              </a:rPr>
-              <a:t>verify_identification.py</a:t>
-            </a:r>
-            <a:r>
-              <a:rPr i="1"/>
-              <a:t> → </a:t>
-            </a:r>
-            <a:r>
-              <a:rPr i="1">
-                <a:latin typeface="Courier"/>
-              </a:rPr>
-              <a:t>scenarios.py</a:t>
-            </a:r>
-            <a:r>
-              <a:rPr i="1"/>
-              <a:t> → </a:t>
-            </a:r>
-            <a:r>
-              <a:rPr i="1">
-                <a:latin typeface="Courier"/>
-              </a:rPr>
-              <a:t>baselines.py</a:t>
-            </a:r>
-            <a:r>
-              <a:rPr i="1"/>
-              <a:t> → </a:t>
-            </a:r>
-            <a:r>
-              <a:rPr i="1">
-                <a:latin typeface="Courier"/>
-              </a:rPr>
-              <a:t>seed_sweep.py</a:t>
-            </a:r>
-            <a:r>
-              <a:rPr i="1"/>
-              <a:t> — not hand-typed, and not carried over from an earlier draft. Scenario D (§3.6) has no marker — </a:t>
-            </a:r>
-            <a:r>
-              <a:rPr i="1">
-                <a:latin typeface="Courier"/>
-              </a:rPr>
-              <a:t>scenario_d.py</a:t>
-            </a:r>
-            <a:r>
-              <a:rPr i="1"/>
-              <a:t> doesn’t write to </a:t>
-            </a:r>
-            <a:r>
-              <a:rPr i="1">
-                <a:latin typeface="Courier"/>
-              </a:rPr>
-              <a:t>results.json</a:t>
-            </a:r>
-            <a:r>
-              <a:rPr i="1"/>
-              <a:t> (a 200h run per approach is a different cost profile than the other scripts; not yet worth the wiring) — so its numbers are hand-maintained, but re-verified against a fresh </a:t>
-            </a:r>
-            <a:r>
-              <a:rPr i="1">
-                <a:latin typeface="Courier"/>
-              </a:rPr>
-              <a:t>python scenario_d.py</a:t>
-            </a:r>
-            <a:r>
-              <a:rPr i="1"/>
-              <a:t> run before being typed in, not carried over from memory. Prose sections narrate the reasoning and are written by hand, but are checked against the same fresh run before publishing.</a:t>
-            </a:r>
-          </a:p>
-          <a:p>
-            <a:pPr lvl="0" indent="0" marL="0">
-              <a:spcBef>
-                <a:spcPts val="3000"/>
-              </a:spcBef>
-              <a:buNone/>
-            </a:pPr>
-            <a:r>
-              <a:rPr b="1"/>
-              <a:t>0. Why this exists</a:t>
-            </a:r>
-          </a:p>
-          <a:p>
-            <a:pPr lvl="0" indent="0" marL="0">
-              <a:buNone/>
-            </a:pPr>
-            <a:r>
-              <a:rPr/>
-              <a:t>Five recurring pain points show up across upstream operations literature and practice, and they shaped every design decision below rather than sitting as background motivation:</a:t>
-            </a:r>
-          </a:p>
-          <a:p>
-            <a:pPr lvl="0" indent="-342900" marL="342900">
-              <a:buAutoNum type="arabicPeriod"/>
-            </a:pPr>
-            <a:r>
-              <a:rPr b="1"/>
-              <a:t>Operators “baby” the choke.</a:t>
-            </a:r>
-            <a:r>
-              <a:rPr/>
-              <a:t> Fear of sand production or formation damage leads to conservative, static settings that leave real production capacity on the table (Eng-Tips forum discussion among production engineers).</a:t>
-            </a:r>
-          </a:p>
-          <a:p>
-            <a:pPr lvl="0" indent="-342900" marL="342900">
-              <a:buAutoNum type="arabicPeriod"/>
-            </a:pPr>
-            <a:r>
-              <a:rPr b="1"/>
-              <a:t>One engineer, too many wells.</a:t>
-            </a:r>
-            <a:r>
-              <a:rPr/>
-              <a:t> A choke gets set once during a shift and then left alone, because nobody has the bandwidth to revisit it continuously (standard industry practice, as described in patent literature on well automation).</a:t>
-            </a:r>
-          </a:p>
-          <a:p>
-            <a:pPr lvl="0" indent="-342900" marL="342900">
-              <a:buAutoNum type="arabicPeriod"/>
-            </a:pPr>
-            <a:r>
-              <a:rPr b="1"/>
-              <a:t>Instability is caught reactively.</a:t>
-            </a:r>
-            <a:r>
-              <a:rPr/>
-              <a:t> Slugging and other flow instabilities are typically noticed only after a human sees the trend on a screen, not prevented (SPE technical paper on flow assurance).</a:t>
-            </a:r>
-          </a:p>
-          <a:p>
-            <a:pPr lvl="0" indent="-342900" marL="342900">
-              <a:buAutoNum type="arabicPeriod"/>
-            </a:pPr>
-            <a:r>
-              <a:rPr b="1"/>
-              <a:t>APC doesn’t scale upstream because models need a dedicated team.</a:t>
-            </a:r>
-            <a:r>
-              <a:rPr/>
-              <a:t> The on-record barrier from a Honeywell upstream solutions interview isn’t algorithmic sophistication — it’s that advanced process control adoption stalls because someone has to keep the model current. A search-based, no-heavy- optimizer controller with a fresh from-scratch identification step directly answers this: there is no solver license, no tuning of an optimizer’s internals, nothing exotic to maintain.</a:t>
-            </a:r>
-          </a:p>
-          <a:p>
-            <a:pPr lvl="0" indent="-342900" marL="342900">
-              <a:buAutoNum type="arabicPeriod"/>
-            </a:pPr>
-            <a:r>
-              <a:rPr b="1"/>
-              <a:t>Alarm fatigue and distrust of opaque automation.</a:t>
-            </a:r>
-            <a:r>
-              <a:rPr/>
-              <a:t> Operators override what they don’t understand (NTSB SCADA safety review). Answered directly in §2.4, not just in principle.</a:t>
-            </a:r>
-          </a:p>
-          <a:p>
-            <a:pPr lvl="0" indent="0" marL="0">
-              <a:buNone/>
-            </a:pPr>
-            <a:r>
-              <a:rPr/>
-              <a:t>ChokePilot is a small-scale, single-well version of the same closed-loop direction Honeywell’s APC customers are already moving toward on wells — a focused proof-of-concept of the wellhead-to-control-room optimization problem Honeywell’s Upstream Production Performance Suite (UPPS) addresses at scale. It does not claim equivalence; it echoes the same idea at a scale one person can build and verify in a project timeline.</a:t>
-            </a:r>
-          </a:p>
-          <a:p>
-            <a:pPr lvl="0" indent="0" marL="0">
-              <a:spcBef>
-                <a:spcPts val="3000"/>
-              </a:spcBef>
-              <a:buNone/>
-            </a:pPr>
-            <a:r>
-              <a:rPr b="1"/>
-              <a:t>1. Process Understanding &amp; Model</a:t>
-            </a:r>
-          </a:p>
-          <a:p>
-            <a:pPr lvl="0" indent="0" marL="0">
-              <a:spcBef>
-                <a:spcPts val="3000"/>
-              </a:spcBef>
-              <a:buNone/>
-            </a:pPr>
-            <a:r>
-              <a:rPr b="1"/>
-              <a:t>1.1 No official simulator, so a calibrated substitute stands in</a:t>
-            </a:r>
-          </a:p>
-          <a:p>
-            <a:pPr lvl="0" indent="0" marL="0">
-              <a:buNone/>
-            </a:pPr>
-            <a:r>
-              <a:rPr/>
-              <a:t>The platform provided no official simulator for this challenge — only </a:t>
+              <a:rPr/>
+              <a:t> imports </a:t>
             </a:r>
             <a:r>
               <a:rPr>
                 <a:latin typeface="Courier"/>
               </a:rPr>
-              <a:t>data/Autonomous_Choke_Control_Simulated_Dataset.csv</a:t>
-            </a:r>
-            <a:r>
-              <a:rPr/>
-              <a:t>, a single 120-hour run with the choke held at 30/40/55/45/65% in turn, and a presentation template. </a:t>
+              <a:t>_fit_fopdt</a:t>
+            </a:r>
+            <a:r>
+              <a:rPr/>
+              <a:t> and </a:t>
+            </a:r>
+            <a:r>
+              <a:rPr>
+                <a:latin typeface="Courier"/>
+              </a:rPr>
+              <a:t>_simulate_fopdt</a:t>
+            </a:r>
+            <a:r>
+              <a:rPr/>
+              <a:t> directly from </a:t>
             </a:r>
             <a:r>
               <a:rPr>
@@ -3405,301 +3779,6 @@
             </a:r>
             <a:r>
               <a:rPr/>
-              <a:t> is a </a:t>
-            </a:r>
-            <a:r>
-              <a:rPr b="1"/>
-              <a:t>calibrated substitute</a:t>
-            </a:r>
-            <a:r>
-              <a:rPr/>
-              <a:t>, clearly commented as such, fit to that CSV:</a:t>
-            </a:r>
-          </a:p>
-          <a:p>
-            <a:pPr lvl="0"/>
-            <a:r>
-              <a:rPr b="1"/>
-              <a:t>Steady-state map</a:t>
-            </a:r>
-            <a:r>
-              <a:rPr/>
-              <a:t>, per channel independently: </a:t>
-            </a:r>
-            <a:r>
-              <a:rPr>
-                <a:latin typeface="Courier"/>
-              </a:rPr>
-              <a:t>y_ss(u) = A + B·u/(u+uh)</a:t>
-            </a:r>
-            <a:r>
-              <a:rPr/>
-              <a:t>. For oil rate </a:t>
-            </a:r>
-            <a:r>
-              <a:rPr>
-                <a:latin typeface="Courier"/>
-              </a:rPr>
-              <a:t>Q</a:t>
-            </a:r>
-            <a:r>
-              <a:rPr/>
-              <a:t>, </a:t>
-            </a:r>
-            <a:r>
-              <a:rPr>
-                <a:latin typeface="Courier"/>
-              </a:rPr>
-              <a:t>A</a:t>
-            </a:r>
-            <a:r>
-              <a:rPr/>
-              <a:t> is fixed at 0 (a fully shut choke must give zero flow).</a:t>
-            </a:r>
-          </a:p>
-          <a:p>
-            <a:pPr lvl="0"/>
-            <a:r>
-              <a:rPr b="1"/>
-              <a:t>Dynamics</a:t>
-            </a:r>
-            <a:r>
-              <a:rPr/>
-              <a:t>: first-order-plus-dead-time (FOPDT), discretized with the </a:t>
-            </a:r>
-            <a:r>
-              <a:rPr i="1"/>
-              <a:t>exact</a:t>
-            </a:r>
-            <a:r>
-              <a:rPr/>
-              <a:t> zero-order-hold form </a:t>
-            </a:r>
-            <a:r>
-              <a:rPr>
-                <a:latin typeface="Courier"/>
-              </a:rPr>
-              <a:t>alpha = 1 - exp(-Ts/tau)</a:t>
-            </a:r>
-            <a:r>
-              <a:rPr/>
-              <a:t> (not the Euler approximation </a:t>
-            </a:r>
-            <a:r>
-              <a:rPr>
-                <a:latin typeface="Courier"/>
-              </a:rPr>
-              <a:t>Ts/tau</a:t>
-            </a:r>
-            <a:r>
-              <a:rPr/>
-              <a:t>, which is only accurate when </a:t>
-            </a:r>
-            <a:r>
-              <a:rPr>
-                <a:latin typeface="Courier"/>
-              </a:rPr>
-              <a:t>Ts &lt;&lt; tau</a:t>
-            </a:r>
-            <a:r>
-              <a:rPr/>
-              <a:t> and can be unstable outside that regime).</a:t>
-            </a:r>
-          </a:p>
-          <a:p>
-            <a:pPr lvl="0"/>
-            <a:r>
-              <a:rPr b="1"/>
-              <a:t>Noise</a:t>
-            </a:r>
-            <a:r>
-              <a:rPr/>
-              <a:t>: independent Gaussian measurement noise per channel, matched to the residual std left after the fit, added to each reading without feeding back into the internal state (sensor noise, not process noise).</a:t>
-            </a:r>
-          </a:p>
-          <a:p>
-            <a:pPr lvl="0"/>
-            <a:r>
-              <a:rPr/>
-              <a:t>The steady-state fit uses </a:t>
-            </a:r>
-            <a:r>
-              <a:rPr b="1"/>
-              <a:t>only the last ~6 hours of each dwell period</a:t>
-            </a:r>
-            <a:r>
-              <a:rPr/>
-              <a:t> — samples close to actually being at steady state — not the whole trajectory including transients. Fitting on transient-contaminated samples was found to bias the curve and, downstream, the tau/theta search that compensated for it (see §1.2).</a:t>
-            </a:r>
-          </a:p>
-          <a:p>
-            <a:pPr lvl="0"/>
-            <a:r>
-              <a:rPr>
-                <a:latin typeface="Courier"/>
-              </a:rPr>
-              <a:t>uh</a:t>
-            </a:r>
-            <a:r>
-              <a:rPr/>
-              <a:t> and </a:t>
-            </a:r>
-            <a:r>
-              <a:rPr>
-                <a:latin typeface="Courier"/>
-              </a:rPr>
-              <a:t>(tau, theta)</a:t>
-            </a:r>
-            <a:r>
-              <a:rPr/>
-              <a:t> come from a brute-force grid search (linear part </a:t>
-            </a:r>
-            <a:r>
-              <a:rPr>
-                <a:latin typeface="Courier"/>
-              </a:rPr>
-              <a:t>A, B</a:t>
-            </a:r>
-            <a:r>
-              <a:rPr/>
-              <a:t> solved in closed form at each grid point) — no optimizer dependency.</a:t>
-            </a:r>
-          </a:p>
-          <a:p>
-            <a:pPr lvl="0" indent="0" marL="0">
-              <a:buNone/>
-            </a:pPr>
-            <a:r>
-              <a:rPr b="1"/>
-              <a:t>Important, honestly reported finding:</a:t>
-            </a:r>
-            <a:r>
-              <a:rPr/>
-              <a:t> with the uh grid widened to check for boundary-pinning, WHP, FLP, and BHP all pin at the widened boundary (50,000) — their steady-state response is </a:t>
-            </a:r>
-            <a:r>
-              <a:rPr b="1"/>
-              <a:t>statistically indistinguishable from linear</a:t>
-            </a:r>
-            <a:r>
-              <a:rPr/>
-              <a:t> over the reference data’s tested 30–65% choke range. Only </a:t>
-            </a:r>
-            <a:r>
-              <a:rPr>
-                <a:latin typeface="Courier"/>
-              </a:rPr>
-              <a:t>Q</a:t>
-            </a:r>
-            <a:r>
-              <a:rPr/>
-              <a:t>, anchored through zero, genuinely needs the saturating (Michaelis-Menten) shape. This is reported explicitly by the fitting code (a printed warning) rather than silently accepted.</a:t>
-            </a:r>
-          </a:p>
-          <a:p>
-            <a:pPr lvl="0" indent="0" marL="0">
-              <a:buNone/>
-            </a:pPr>
-            <a:r>
-              <a:rPr b="1"/>
-              <a:t>The reference CSV covers only 5 distinct choke levels</a:t>
-            </a:r>
-            <a:r>
-              <a:rPr/>
-              <a:t> (30, 40, 45, 55, 65%), each held for one dwell period, and the fit is a single deterministic least-squares point estimate — there is no confidence interval, bootstrap, or any other uncertainty quantification anywhere in this pipeline. Every downstream number (identified tau, safety limits, controller predictions) inherits that uncertainty without a formal error bar attached to it.</a:t>
-            </a:r>
-          </a:p>
-          <a:p>
-            <a:pPr lvl="0" indent="0" marL="0">
-              <a:spcBef>
-                <a:spcPts val="3000"/>
-              </a:spcBef>
-              <a:buNone/>
-            </a:pPr>
-            <a:r>
-              <a:rPr b="1"/>
-              <a:t>1.2 Fresh open-loop step test, and an honest accounting of what it tests</a:t>
-            </a:r>
-          </a:p>
-          <a:p>
-            <a:pPr lvl="0" indent="0" marL="0">
-              <a:buNone/>
-            </a:pPr>
-            <a:r>
-              <a:rPr/>
-              <a:t>Per the brief (“students are expected to generate their own data using the simulator”), </a:t>
-            </a:r>
-            <a:r>
-              <a:rPr>
-                <a:latin typeface="Courier"/>
-              </a:rPr>
-              <a:t>identify.py</a:t>
-            </a:r>
-            <a:r>
-              <a:rPr/>
-              <a:t> does not reuse the reference CSV for model identification. It drives its own monotonic staircase — 0/10/20/…/100% choke, 40 hours dwell per step (</a:t>
-            </a:r>
-            <a:r>
-              <a:rPr>
-                <a:latin typeface="Courier"/>
-              </a:rPr>
-              <a:t>DWELL_HOURS</a:t>
-            </a:r>
-            <a:r>
-              <a:rPr/>
-              <a:t>, see §1.2’s dwell-time history below) — against the calibrated simulator, and fits an FOPDT model to that fresh run.</a:t>
-            </a:r>
-          </a:p>
-          <a:p>
-            <a:pPr lvl="0" indent="0" marL="0">
-              <a:buNone/>
-            </a:pPr>
-            <a:r>
-              <a:rPr b="1"/>
-              <a:t>Reframing a claim from an earlier draft:</a:t>
-            </a:r>
-            <a:r>
-              <a:rPr/>
-              <a:t> </a:t>
-            </a:r>
-            <a:r>
-              <a:rPr>
-                <a:latin typeface="Courier"/>
-              </a:rPr>
-              <a:t>identify.py</a:t>
-            </a:r>
-            <a:r>
-              <a:rPr/>
-              <a:t> imports </a:t>
-            </a:r>
-            <a:r>
-              <a:rPr>
-                <a:latin typeface="Courier"/>
-              </a:rPr>
-              <a:t>_fit_fopdt</a:t>
-            </a:r>
-            <a:r>
-              <a:rPr/>
-              <a:t> and </a:t>
-            </a:r>
-            <a:r>
-              <a:rPr>
-                <a:latin typeface="Courier"/>
-              </a:rPr>
-              <a:t>_simulate_fopdt</a:t>
-            </a:r>
-            <a:r>
-              <a:rPr/>
-              <a:t> directly from </a:t>
-            </a:r>
-            <a:r>
-              <a:rPr>
-                <a:latin typeface="Courier"/>
-              </a:rPr>
-              <a:t>data/simulator.py</a:t>
-            </a:r>
-            <a:r>
-              <a:rPr/>
               <a:t> — the </a:t>
             </a:r>
             <a:r>
@@ -3756,6 +3835,28 @@
           </a:p>
         </p:txBody>
       </p:sp>
+    </p:spTree>
+  </p:cSld>
+</p:sld>
+</file>
+
+<file path=ppt/slides/slide2.xml><?xml version="1.0" encoding="utf-8"?>
+<p:sld xmlns:a="http://schemas.openxmlformats.org/drawingml/2006/main" xmlns:r="http://schemas.openxmlformats.org/officeDocument/2006/relationships" xmlns:p="http://schemas.openxmlformats.org/presentationml/2006/main">
+  <p:cSld>
+    <p:spTree>
+      <p:nvGrpSpPr>
+        <p:cNvPr id="1" name=""/>
+        <p:cNvGrpSpPr/>
+        <p:nvPr/>
+      </p:nvGrpSpPr>
+      <p:grpSpPr>
+        <a:xfrm>
+          <a:off x="0" y="0"/>
+          <a:ext cx="0" cy="0"/>
+          <a:chOff x="0" y="0"/>
+          <a:chExt cx="0" cy="0"/>
+        </a:xfrm>
+      </p:grpSpPr>
       <p:graphicFrame>
         <p:nvGraphicFramePr>
           <p:cNvPr id="6" name="Content Placeholder 5"/>
@@ -3767,8 +3868,8 @@
           </p:nvPr>
         </p:nvGraphicFramePr>
         <p:xfrm>
-          <a:off x="457200" y="3594100"/>
-          <a:ext cx="8229600" cy="139700"/>
+          <a:off x="457200" y="1193800"/>
+          <a:ext cx="8229600" cy="762000"/>
         </p:xfrm>
         <a:graphic>
           <a:graphicData uri="http://schemas.openxmlformats.org/drawingml/2006/table">
@@ -4189,8 +4290,8 @@
         </p:nvSpPr>
         <p:spPr>
           <a:xfrm>
-            <a:off x="457200" y="3860800"/>
-            <a:ext cx="8229600" cy="609600"/>
+            <a:off x="457200" y="2082800"/>
+            <a:ext cx="8229600" cy="2374900"/>
           </a:xfrm>
         </p:spPr>
         <p:txBody>
@@ -4219,7 +4320,7 @@
             </a:pPr>
             <a:r>
               <a:rPr b="1"/>
-              <a:t>Fix 1 — dwell time (</a:t>
+              <a:t>The dwell-time fix (</a:t>
             </a:r>
             <a:r>
               <a:rPr b="1">
@@ -4260,7 +4361,7 @@
             </a:pPr>
             <a:r>
               <a:rPr b="1"/>
-              <a:t>Fix 2 — a one-sample lag between the fitting code and the live simulator.</a:t>
+              <a:t>The timing-lag fix — a one-sample lag between the fitting code and the live simulator.</a:t>
             </a:r>
             <a:r>
               <a:rPr/>
@@ -4435,7 +4536,7 @@
             </a:r>
             <a:r>
               <a:rPr b="1"/>
-              <a:t>resolved Q’s “still-open question” from Fix 1</a:t>
+              <a:t>resolved Q’s “still-open question” from the dwell-time fix</a:t>
             </a:r>
             <a:r>
               <a:rPr/>
@@ -4472,7 +4573,7 @@
             </a:r>
             <a:r>
               <a:rPr/>
-              <a:t> — a direct consequence of Fix 2 resolving Q’s bias while leaving BHP’s roughly where it was. BHP’s own possible explanation is in §1.3.</a:t>
+              <a:t> — a direct consequence of the timing-lag fix resolving Q’s bias while leaving BHP’s roughly where it was. BHP’s own possible explanation is in §1.3.</a:t>
             </a:r>
           </a:p>
           <a:p>
@@ -4517,7 +4618,7 @@
 </p:sld>
 </file>
 
-<file path=ppt/slides/slide2.xml><?xml version="1.0" encoding="utf-8"?>
+<file path=ppt/slides/slide3.xml><?xml version="1.0" encoding="utf-8"?>
 <p:sld xmlns:a="http://schemas.openxmlformats.org/drawingml/2006/main" xmlns:r="http://schemas.openxmlformats.org/officeDocument/2006/relationships" xmlns:p="http://schemas.openxmlformats.org/presentationml/2006/main">
   <p:cSld>
     <p:spTree>
@@ -4915,7 +5016,7 @@
             </a:pPr>
             <a:r>
               <a:rPr/>
-              <a:t>This table changed shape after the Tier-0 one-sample-lag fix (§1.2): with the old, laggy </a:t>
+              <a:t>This table changed shape after the timing-lag fix (§1.2): with the old, laggy </a:t>
             </a:r>
             <a:r>
               <a:rPr>
@@ -4974,7 +5075,7 @@
 </p:sld>
 </file>
 
-<file path=ppt/slides/slide3.xml><?xml version="1.0" encoding="utf-8"?>
+<file path=ppt/slides/slide4.xml><?xml version="1.0" encoding="utf-8"?>
 <p:sld xmlns:a="http://schemas.openxmlformats.org/drawingml/2006/main" xmlns:r="http://schemas.openxmlformats.org/officeDocument/2006/relationships" xmlns:p="http://schemas.openxmlformats.org/presentationml/2006/main">
   <p:cSld>
     <p:spTree>
@@ -5634,7 +5735,7 @@
 </p:sld>
 </file>
 
-<file path=ppt/slides/slide4.xml><?xml version="1.0" encoding="utf-8"?>
+<file path=ppt/slides/slide5.xml><?xml version="1.0" encoding="utf-8"?>
 <p:sld xmlns:a="http://schemas.openxmlformats.org/drawingml/2006/main" xmlns:r="http://schemas.openxmlformats.org/officeDocument/2006/relationships" xmlns:p="http://schemas.openxmlformats.org/presentationml/2006/main">
   <p:cSld>
     <p:spTree>
@@ -5663,7 +5764,7 @@
         </p:nvGraphicFramePr>
         <p:xfrm>
           <a:off x="457200" y="1193800"/>
-          <a:ext cx="8229600" cy="292100"/>
+          <a:ext cx="8229600" cy="228600"/>
         </p:xfrm>
         <a:graphic>
           <a:graphicData uri="http://schemas.openxmlformats.org/drawingml/2006/table">
@@ -6071,8 +6172,8 @@
         </p:nvSpPr>
         <p:spPr>
           <a:xfrm>
-            <a:off x="457200" y="1612900"/>
-            <a:ext cx="8229600" cy="2844800"/>
+            <a:off x="457200" y="1549400"/>
+            <a:ext cx="8229600" cy="762000"/>
           </a:xfrm>
         </p:spPr>
         <p:txBody>
@@ -6247,6 +6348,27 @@
               <a:t>3.1 Scenario A — Startup to Target (15% choke → 100 bbl/hr, 80h)</a:t>
             </a:r>
           </a:p>
+        </p:txBody>
+      </p:sp>
+      <p:sp>
+        <p:nvSpPr>
+          <p:cNvPr id="3" name="Content Placeholder 2"/>
+          <p:cNvSpPr>
+            <a:spLocks noGrp="1"/>
+          </p:cNvSpPr>
+          <p:nvPr>
+            <p:ph idx="1"/>
+          </p:nvPr>
+        </p:nvSpPr>
+        <p:spPr>
+          <a:xfrm>
+            <a:off x="457200" y="2616200"/>
+            <a:ext cx="8229600" cy="495300"/>
+          </a:xfrm>
+        </p:spPr>
+        <p:txBody>
+          <a:bodyPr/>
+          <a:lstStyle/>
           <a:p>
             <a:pPr lvl="0"/>
             <a:r>
@@ -6357,6 +6479,27 @@
               <a:t>3.2 Scenario B — Target Tracking (34.2% choke start, 100→150 bbl/hr step at t=60h, 140h)</a:t>
             </a:r>
           </a:p>
+        </p:txBody>
+      </p:sp>
+      <p:sp>
+        <p:nvSpPr>
+          <p:cNvPr id="3" name="Content Placeholder 2"/>
+          <p:cNvSpPr>
+            <a:spLocks noGrp="1"/>
+          </p:cNvSpPr>
+          <p:nvPr>
+            <p:ph idx="1"/>
+          </p:nvPr>
+        </p:nvSpPr>
+        <p:spPr>
+          <a:xfrm>
+            <a:off x="457200" y="3416300"/>
+            <a:ext cx="8229600" cy="139700"/>
+          </a:xfrm>
+        </p:spPr>
+        <p:txBody>
+          <a:bodyPr/>
+          <a:lstStyle/>
           <a:p>
             <a:pPr lvl="0"/>
             <a:r>
@@ -6415,6 +6558,27 @@
               <a:t>3.3 Scenario C — Infeasible Target (34.2% choke start, 400 bbl/hr requested, 100h)</a:t>
             </a:r>
           </a:p>
+        </p:txBody>
+      </p:sp>
+      <p:sp>
+        <p:nvSpPr>
+          <p:cNvPr id="3" name="Content Placeholder 2"/>
+          <p:cNvSpPr>
+            <a:spLocks noGrp="1"/>
+          </p:cNvSpPr>
+          <p:nvPr>
+            <p:ph idx="1"/>
+          </p:nvPr>
+        </p:nvSpPr>
+        <p:spPr>
+          <a:xfrm>
+            <a:off x="457200" y="3860800"/>
+            <a:ext cx="8229600" cy="584200"/>
+          </a:xfrm>
+        </p:spPr>
+        <p:txBody>
+          <a:bodyPr/>
+          <a:lstStyle/>
           <a:p>
             <a:pPr lvl="0"/>
             <a:r>
@@ -6587,7 +6751,7 @@
 </p:sld>
 </file>
 
-<file path=ppt/slides/slide5.xml><?xml version="1.0" encoding="utf-8"?>
+<file path=ppt/slides/slide6.xml><?xml version="1.0" encoding="utf-8"?>
 <p:sld xmlns:a="http://schemas.openxmlformats.org/drawingml/2006/main" xmlns:r="http://schemas.openxmlformats.org/officeDocument/2006/relationships" xmlns:p="http://schemas.openxmlformats.org/presentationml/2006/main">
   <p:cSld>
     <p:spTree>
@@ -6956,7 +7120,7 @@
 </p:sld>
 </file>
 
-<file path=ppt/slides/slide6.xml><?xml version="1.0" encoding="utf-8"?>
+<file path=ppt/slides/slide7.xml><?xml version="1.0" encoding="utf-8"?>
 <p:sld xmlns:a="http://schemas.openxmlformats.org/drawingml/2006/main" xmlns:r="http://schemas.openxmlformats.org/officeDocument/2006/relationships" xmlns:p="http://schemas.openxmlformats.org/presentationml/2006/main">
   <p:cSld>
     <p:spTree>
@@ -7475,7 +7639,7 @@
 </p:sld>
 </file>
 
-<file path=ppt/slides/slide7.xml><?xml version="1.0" encoding="utf-8"?>
+<file path=ppt/slides/slide8.xml><?xml version="1.0" encoding="utf-8"?>
 <p:sld xmlns:a="http://schemas.openxmlformats.org/drawingml/2006/main" xmlns:r="http://schemas.openxmlformats.org/officeDocument/2006/relationships" xmlns:p="http://schemas.openxmlformats.org/presentationml/2006/main">
   <p:cSld>
     <p:spTree>
@@ -8397,7 +8561,7 @@
 </p:sld>
 </file>
 
-<file path=ppt/slides/slide8.xml><?xml version="1.0" encoding="utf-8"?>
+<file path=ppt/slides/slide9.xml><?xml version="1.0" encoding="utf-8"?>
 <p:sld xmlns:a="http://schemas.openxmlformats.org/drawingml/2006/main" xmlns:r="http://schemas.openxmlformats.org/officeDocument/2006/relationships" xmlns:p="http://schemas.openxmlformats.org/presentationml/2006/main">
   <p:cSld>
     <p:spTree>
@@ -8426,7 +8590,7 @@
         </p:nvGraphicFramePr>
         <p:xfrm>
           <a:off x="457200" y="1193800"/>
-          <a:ext cx="8229600" cy="355600"/>
+          <a:ext cx="8229600" cy="266700"/>
         </p:xfrm>
         <a:graphic>
           <a:graphicData uri="http://schemas.openxmlformats.org/drawingml/2006/table">
@@ -8770,8 +8934,8 @@
         </p:nvSpPr>
         <p:spPr>
           <a:xfrm>
-            <a:off x="457200" y="1676400"/>
-            <a:ext cx="8229600" cy="2781300"/>
+            <a:off x="457200" y="1587500"/>
+            <a:ext cx="8229600" cy="2870200"/>
           </a:xfrm>
         </p:spPr>
         <p:txBody>
@@ -8783,6 +8947,189 @@
             </a:pPr>
             <a:r>
               <a:rPr b="1"/>
+              <a:t>The headline: what MPC actually buys over realistic manual operation.</a:t>
+            </a:r>
+            <a:r>
+              <a:rPr/>
+              <a:t> Fixed-operator-proxy stands in for a real operator working without this pipeline’s model or envelope knowledge — the comparison that matters most, since it’s the one this project is actually meant to replace (pain point #1). Barrel and per-day figures below are computed directly from </a:t>
+            </a:r>
+            <a:r>
+              <a:rPr>
+                <a:latin typeface="Courier"/>
+              </a:rPr>
+              <a:t>outputs/results.json</a:t>
+            </a:r>
+            <a:r>
+              <a:rPr/>
+              <a:t> (barrel gain over each scenario’s own run length, converted to a daily rate — not hand-typed):</a:t>
+            </a:r>
+          </a:p>
+          <a:p>
+            <a:pPr lvl="0"/>
+            <a:r>
+              <a:rPr b="1"/>
+              <a:t>Scenario A:</a:t>
+            </a:r>
+            <a:r>
+              <a:rPr/>
+              <a:t> MPC produces </a:t>
+            </a:r>
+            <a:r>
+              <a:rPr b="1"/>
+              <a:t>+2,738 bbl more</a:t>
+            </a:r>
+            <a:r>
+              <a:rPr/>
+              <a:t> than the operator-proxy over the 80h run — </a:t>
+            </a:r>
+            <a:r>
+              <a:rPr b="1"/>
+              <a:t>+821 bbl/day</a:t>
+            </a:r>
+            <a:r>
+              <a:rPr/>
+              <a:t> — while cutting constraint violations from </a:t>
+            </a:r>
+            <a:r>
+              <a:rPr b="1"/>
+              <a:t>66/80 down to 4/80</a:t>
+            </a:r>
+            <a:r>
+              <a:rPr/>
+              <a:t>.</a:t>
+            </a:r>
+          </a:p>
+          <a:p>
+            <a:pPr lvl="0"/>
+            <a:r>
+              <a:rPr b="1"/>
+              <a:t>Scenario B:</a:t>
+            </a:r>
+            <a:r>
+              <a:rPr/>
+              <a:t> </a:t>
+            </a:r>
+            <a:r>
+              <a:rPr b="1"/>
+              <a:t>+3,852 bbl</a:t>
+            </a:r>
+            <a:r>
+              <a:rPr/>
+              <a:t> over 140h — </a:t>
+            </a:r>
+            <a:r>
+              <a:rPr b="1"/>
+              <a:t>+660 bbl/day</a:t>
+            </a:r>
+            <a:r>
+              <a:rPr/>
+              <a:t> — while cutting violations from </a:t>
+            </a:r>
+            <a:r>
+              <a:rPr b="1"/>
+              <a:t>23/140 to 0/140</a:t>
+            </a:r>
+            <a:r>
+              <a:rPr/>
+              <a:t>.</a:t>
+            </a:r>
+          </a:p>
+          <a:p>
+            <a:pPr lvl="0"/>
+            <a:r>
+              <a:rPr b="1"/>
+              <a:t>Scenario C inverts, and that inversion is itself the result:</a:t>
+            </a:r>
+            <a:r>
+              <a:rPr/>
+              <a:t> the operator-proxy nominally out-produces MPC by 2,972 bbl over the 100h run (</a:t>
+            </a:r>
+            <a:r>
+              <a:rPr b="1"/>
+              <a:t>+713 bbl/day</a:t>
+            </a:r>
+            <a:r>
+              <a:rPr/>
+              <a:t> in the proxy’s favor) — but only by riding the choke wide open straight through the safety envelope, racking up </a:t>
+            </a:r>
+            <a:r>
+              <a:rPr b="1"/>
+              <a:t>85/100</a:t>
+            </a:r>
+            <a:r>
+              <a:rPr/>
+              <a:t> constraint violations against MPC’s </a:t>
+            </a:r>
+            <a:r>
+              <a:rPr b="1"/>
+              <a:t>0/100</a:t>
+            </a:r>
+            <a:r>
+              <a:rPr/>
+              <a:t>. Output produced by blowing through a pressure limit isn’t a result to chase; it’s the exact failure mode this project exists to prevent.</a:t>
+            </a:r>
+          </a:p>
+          <a:p>
+            <a:pPr lvl="0"/>
+            <a:r>
+              <a:rPr b="1"/>
+              <a:t>Scenario D</a:t>
+            </a:r>
+            <a:r>
+              <a:rPr/>
+              <a:t> (200h, hand-verified against a fresh </a:t>
+            </a:r>
+            <a:r>
+              <a:rPr>
+                <a:latin typeface="Courier"/>
+              </a:rPr>
+              <a:t>python scenario_d.py</a:t>
+            </a:r>
+            <a:r>
+              <a:rPr/>
+              <a:t> run since it isn’t in </a:t>
+            </a:r>
+            <a:r>
+              <a:rPr>
+                <a:latin typeface="Courier"/>
+              </a:rPr>
+              <a:t>results.json</a:t>
+            </a:r>
+            <a:r>
+              <a:rPr/>
+              <a:t>) shows the same pattern at its cleanest: </a:t>
+            </a:r>
+            <a:r>
+              <a:rPr b="1"/>
+              <a:t>+7,447 bbl</a:t>
+            </a:r>
+            <a:r>
+              <a:rPr/>
+              <a:t> total, </a:t>
+            </a:r>
+            <a:r>
+              <a:rPr b="1"/>
+              <a:t>+893 bbl/day</a:t>
+            </a:r>
+            <a:r>
+              <a:rPr/>
+              <a:t>, </a:t>
+            </a:r>
+            <a:r>
+              <a:rPr b="1"/>
+              <a:t>0/200 vs. 121/200</a:t>
+            </a:r>
+            <a:r>
+              <a:rPr/>
+              <a:t> violations.</a:t>
+            </a:r>
+          </a:p>
+          <a:p>
+            <a:pPr lvl="0" indent="0" marL="0">
+              <a:buNone/>
+            </a:pPr>
+            <a:r>
+              <a:rPr b="1"/>
               <a:t>Scenario C’s Fixed-operator-proxy and PI rows are identical (85/100 violations, 18,778.3 barrels) — checked, not a copy-paste artifact.</a:t>
             </a:r>
             <a:r>
@@ -8806,7 +9153,11 @@
             </a:pPr>
             <a:r>
               <a:rPr b="1"/>
-              <a:t>The honest, complete story this table tells — and it’s not the story the Scenario D setup was originally built to find:</a:t>
+              <a:t>A secondary, more surprising finding: MPC ties Fixed-optimal, its model-informed but non-adaptive sibling, in all four scenarios — including D, which was built specifically to find a gap between them.</a:t>
+            </a:r>
+            <a:r>
+              <a:rPr/>
+              <a:t> BHP and Q are independent FOPDT channels with no coupling in this model, so Scenario D’s declining reservoir never moves Q off target and never drifts BHP close enough to its floor (ends ~170 psi above it after 200h) to matter — MPC’s live re-planning had nothing to correct that Fixed-optimal’s envelope-aware static setpoint didn’t already handle. This is a real, checked result (both approaches hold choke within noise of 34.2% for the entire 200h run), not an assumption, but it’s a narrower and less important claim than the headline above: the production and safety gains that actually matter come from envelope-awareness itself (present in both MPC and Fixed-optimal), not from live re-planning specifically.</a:t>
             </a:r>
           </a:p>
           <a:p>
@@ -8814,25 +9165,8 @@
               <a:buNone/>
             </a:pPr>
             <a:r>
-              <a:rPr b="1"/>
-              <a:t>MPC ties Fixed-optimal in all four scenarios, including D.</a:t>
-            </a:r>
-            <a:r>
-              <a:rPr/>
-              <a:t> Scenario D was built specifically to test whether MPC’s live re-planning beats a static setpoint once the plant drifts. It doesn’t, here: in this project’s model, BHP and Q are independent FOPDT channels with no coupling, so a declining reservoir never moves Q off target and never drifts BHP close enough to its floor (ends ~170 psi above it after 200h) to matter. MPC’s re-planning had nothing to correct that Fixed-optimal’s envelope-aware static setpoint didn’t already handle. This is a real, checked result, not an assumption — see §3.6’s data above and the mechanism check in the project history (both approaches hold choke within noise of 34.2% for the entire 200h run).</a:t>
-            </a:r>
-          </a:p>
-          <a:p>
-            <a:pPr lvl="0" indent="0" marL="0">
-              <a:buNone/>
-            </a:pPr>
-            <a:r>
-              <a:rPr b="1"/>
-              <a:t>Where MPC (and Fixed-optimal) win decisively is against Fixed-operator-proxy — in all four scenarios, not specifically D.</a:t>
-            </a:r>
-            <a:r>
-              <a:rPr/>
-              <a:t> Fixed-operator-proxy underproduces by 22–37% in A/B/D and racks up massive violations everywhere (up to 85/100 in C). But the mechanism is more specific than “operators are conservative, therefore unsafe”: backing off 15 points </a:t>
+              <a:rPr/>
+              <a:t>The mechanism behind Fixed-operator-proxy’s violations is more specific than “operators are conservative, therefore unsafe”: backing off 15 points </a:t>
             </a:r>
             <a:r>
               <a:rPr i="1"/>
@@ -8864,20 +9198,7 @@
             </a:r>
             <a:r>
               <a:rPr/>
-              <a:t> direction for that one constraint. Checked directly in Scenario D: violations start at hour 21 (as soon as the ramp-limited approach reaches 18.7%) and continue at a roughly steady rate for all 200 hours (17 in the first 50h vs. 33 in the last 50h) — the reservoir decline is at most a minor secondary factor, not the primary cause. The same static-FLP-threshold mechanism that explains Scenario A’s violations (§2.3) is what’s actually failing here, not a failure to detect the disturbance.</a:t>
-            </a:r>
-          </a:p>
-          <a:p>
-            <a:pPr lvl="0" indent="0" marL="0">
-              <a:buNone/>
-            </a:pPr>
-            <a:r>
-              <a:rPr b="1"/>
-              <a:t>So the real headline is:</a:t>
-            </a:r>
-            <a:r>
-              <a:rPr/>
-              <a:t> live re-planning (MPC’s specific edge over a static setpoint) shows no measurable benefit in any of these four scenarios, given this model’s lack of cross-channel coupling — but envelope-awareness itself (present in both MPC and Fixed-optimal, absent from the operator-proxy) is the variable that actually matters, and it matters enormously and consistently across all four. PI’s 85/100 violations in Scenario C make the same point from a different angle: a controller with no predictive safety check — model-informed or not — will chase an infeasible target straight through the operating envelope.</a:t>
+              <a:t> direction for that one constraint. Checked directly in Scenario D: violations start at hour 21 (as soon as the ramp-limited approach reaches 18.7%) and continue at a roughly steady rate for all 200 hours (17 in the first 50h vs. 33 in the last 50h) — the reservoir decline is at most a minor secondary factor, not the primary cause. The same static-FLP-threshold mechanism that explains Scenario A’s violations (§2.3) is what’s actually failing here, not a failure to detect the disturbance. PI’s 85/100 violations in Scenario C make the same point from a different angle: a controller with no predictive safety check — model-informed or not — will chase an infeasible target straight through the operating envelope.</a:t>
             </a:r>
           </a:p>
           <a:p>
@@ -8986,7 +9307,7 @@
             </a:r>
             <a:r>
               <a:rPr/>
-              <a:t> for Q (20.0%→19.0%, unchanged across 24–80h dwell tested) — leaving Q’s bias correctly reported as a separate, still-open question rather than folded into an explanation that doesn’t actually cover it. That open question turned out to have its own answer: a one-sample lag between the fitting code and the live simulator (§1.2, Fix 2), unrelated to dwell time, which dropped Q’s error 19.0%→3.0% and made every channel’s θ match exactly. Two separate root causes, found by refusing to let the first fix’s partial success explain away the residual it didn’t actually touch.</a:t>
+              <a:t> for Q (20.0%→19.0%, unchanged across 24–80h dwell tested) — leaving Q’s bias correctly reported as a separate, still-open question rather than folded into an explanation that doesn’t actually cover it. That open question turned out to have its own answer: a one-sample lag between the fitting code and the live simulator (§1.2), unrelated to dwell time, which dropped Q’s error 19.0%→3.0% and made every channel’s θ match exactly. Two separate root causes, found by refusing to let the first fix’s partial success explain away the residual it didn’t actually touch.</a:t>
             </a:r>
           </a:p>
           <a:p>
@@ -9019,7 +9340,7 @@
             </a:r>
             <a:r>
               <a:rPr/>
-              <a:t> §1.3’s correction helps three of four channels (Q, FLP, BHP) post-Tier-0-fix, and is skipped only for WHP. Both outcomes come from the same held-out-RMSE rule with no manual override — the discipline is the point, not any specific channel’s verdict, which is also why this list changed (from “BHP only” to “three of four”) without anyone hand-editing which channels are marked used.</a:t>
+              <a:t> §1.3’s correction helps three of four channels (Q, FLP, BHP) after the timing-lag fix, and is skipped only for WHP. Both outcomes come from the same held-out-RMSE rule with no manual override — the discipline is the point, not any specific channel’s verdict, which is also why this list changed (from “BHP only” to “three of four”) without anyone hand-editing which channels are marked used.</a:t>
             </a:r>
           </a:p>
         </p:txBody>
